--- a/tutorial/T08/tut08.pptx
+++ b/tutorial/T08/tut08.pptx
@@ -4507,7 +4507,7 @@
           <a:p>
             <a:fld id="{90751E9F-A845-4914-A3CC-CC345012599B}" type="datetimeFigureOut">
               <a:rPr lang="en-US" smtClean="0"/>
-              <a:t>3/12/26</a:t>
+              <a:t>3/13/26</a:t>
             </a:fld>
             <a:endParaRPr lang="en-US"/>
           </a:p>
@@ -7780,7 +7780,7 @@
           <a:p>
             <a:fld id="{4110DD41-9B81-A544-8498-92133950A0E4}" type="datetime1">
               <a:rPr lang="en-US" smtClean="0"/>
-              <a:t>3/12/26</a:t>
+              <a:t>3/13/26</a:t>
             </a:fld>
             <a:endParaRPr lang="en-US"/>
           </a:p>
